--- a/Aula02_Pensamento_Indutivo/Aula02_Teoria-19-08-26.pptx
+++ b/Aula02_Pensamento_Indutivo/Aula02_Teoria-19-08-26.pptx
@@ -4127,7 +4127,7 @@
                 <a:latin typeface="Aptos"/>
                 <a:ea typeface="Aptos"/>
               </a:rPr>
-              <a:t>Wessels: representações idiossincráticas revelam pensamento.</a:t>
+              <a:t>Representações idiossincráticas revelam pensamento.</a:t>
             </a:r>
             <a:endParaRPr b="0" lang="pt-BR" sz="1300" strike="noStrike" u="none">
               <a:solidFill>
@@ -4154,7 +4154,7 @@
                 <a:latin typeface="Aptos"/>
                 <a:ea typeface="Aptos"/>
               </a:rPr>
-              <a:t>• Wessels: respostas idiossincráticas também revelam modos de pensar.</a:t>
+              <a:t>Respostas idiossincráticas também revelam modos de pensar.</a:t>
             </a:r>
             <a:endParaRPr b="0" lang="pt-BR" sz="1300" strike="noStrike" u="none">
               <a:solidFill>
@@ -4181,7 +4181,7 @@
                 <a:latin typeface="Aptos"/>
                 <a:ea typeface="Aptos"/>
               </a:rPr>
-              <a:t>• Queiroz: múltiplas expressões exibem aspectos distintos do mesmo conceito.</a:t>
+              <a:t>Múltiplas expressões exibem aspectos distintos do mesmo conceito.</a:t>
             </a:r>
             <a:endParaRPr b="0" lang="pt-BR" sz="1300" strike="noStrike" u="none">
               <a:solidFill>
@@ -4208,7 +4208,7 @@
                 <a:latin typeface="Aptos"/>
                 <a:ea typeface="Aptos"/>
               </a:rPr>
-              <a:t>• Relato: articular código, texto, tabela, gráfico e interpretação.</a:t>
+              <a:t>Articular código, texto, tabela, gráfico e interpretação.</a:t>
             </a:r>
             <a:endParaRPr b="0" lang="pt-BR" sz="1300" strike="noStrike" u="none">
               <a:solidFill>
@@ -5334,7 +5334,7 @@
                 <a:latin typeface="Aptos"/>
                 <a:ea typeface="Aptos"/>
               </a:rPr>
-              <a:t>• Wessels: o contexto e o tipo de dado influenciam a representação escolhida.</a:t>
+              <a:t>O contexto e o tipo de dado influenciam a representação escolhida.</a:t>
             </a:r>
             <a:endParaRPr b="0" lang="pt-BR" sz="1400" strike="noStrike" u="none">
               <a:solidFill>
@@ -5361,7 +5361,7 @@
                 <a:latin typeface="Aptos"/>
                 <a:ea typeface="Aptos"/>
               </a:rPr>
-              <a:t>• Queiroz: a forma de representação influencia erros, antecipações e reorganizações.</a:t>
+              <a:t>A forma de representação influencia erros, antecipações e reorganizações.</a:t>
             </a:r>
             <a:endParaRPr b="0" lang="pt-BR" sz="1400" strike="noStrike" u="none">
               <a:solidFill>
@@ -5388,7 +5388,7 @@
                 <a:latin typeface="Aptos"/>
                 <a:ea typeface="Aptos"/>
               </a:rPr>
-              <a:t>• Relato: explicitar variáveis, relações e restrições.</a:t>
+              <a:t>Explicitar variáveis, relações e restrições.</a:t>
             </a:r>
             <a:endParaRPr b="0" lang="pt-BR" sz="1400" strike="noStrike" u="none">
               <a:solidFill>
@@ -6514,7 +6514,7 @@
                 <a:latin typeface="Aptos"/>
                 <a:ea typeface="Aptos"/>
               </a:rPr>
-              <a:t>• Wessels: apoio icônico favorece análise em modos concretos e simbólicos.</a:t>
+              <a:t>Apoio icônico favorece análise em modos concretos e simbólicos.</a:t>
             </a:r>
             <a:endParaRPr b="0" lang="pt-BR" sz="1400" strike="noStrike" u="none">
               <a:solidFill>
@@ -6541,7 +6541,7 @@
                 <a:latin typeface="Aptos"/>
                 <a:ea typeface="Aptos"/>
               </a:rPr>
-              <a:t>• Queiroz: representações ampliam a percepção de propriedades e relações.</a:t>
+              <a:t>Representações ampliam a percepção de propriedades e relações.</a:t>
             </a:r>
             <a:endParaRPr b="0" lang="pt-BR" sz="1400" strike="noStrike" u="none">
               <a:solidFill>
@@ -6568,7 +6568,7 @@
                 <a:latin typeface="Aptos"/>
                 <a:ea typeface="Aptos"/>
               </a:rPr>
-              <a:t>• Relato: articular código, texto, tabela, gráfico e interpretação.</a:t>
+              <a:t>Articular código, texto, tabela, gráfico e interpretação.</a:t>
             </a:r>
             <a:endParaRPr b="0" lang="pt-BR" sz="1400" strike="noStrike" u="none">
               <a:solidFill>
@@ -7724,7 +7724,7 @@
                 <a:latin typeface="Aptos"/>
                 <a:ea typeface="Aptos"/>
               </a:rPr>
-              <a:t>• Wessels: níveis SOLO ajudam a observar respostas de menor a maior integração.</a:t>
+              <a:t>Níveis SOLO ajudam a observar respostas de menor a maior integração.</a:t>
             </a:r>
             <a:endParaRPr b="0" lang="pt-BR" sz="1200" strike="noStrike" u="none">
               <a:solidFill>
@@ -7751,7 +7751,7 @@
                 <a:latin typeface="Aptos"/>
                 <a:ea typeface="Aptos"/>
               </a:rPr>
-              <a:t>• Queiroz: o resultado final não esgota a aprendizagem do conceito.</a:t>
+              <a:t>O resultado final não esgota a aprendizagem do conceito.</a:t>
             </a:r>
             <a:endParaRPr b="0" lang="pt-BR" sz="1200" strike="noStrike" u="none">
               <a:solidFill>
@@ -7778,7 +7778,7 @@
                 <a:latin typeface="Aptos"/>
                 <a:ea typeface="Aptos"/>
               </a:rPr>
-              <a:t>• Relato: reconhecer limites da ferramenta e do modelo.</a:t>
+              <a:t>Reconhecer limites da ferramenta e do modelo.</a:t>
             </a:r>
             <a:endParaRPr b="0" lang="pt-BR" sz="1200" strike="noStrike" u="none">
               <a:solidFill>
@@ -8934,7 +8934,7 @@
                 <a:latin typeface="Aptos"/>
                 <a:ea typeface="Aptos"/>
               </a:rPr>
-              <a:t>• Wessels: múltiplas representações indicam modelagem mais bem-sucedida.</a:t>
+              <a:t>Múltiplas representações indicam modelagem mais bem-sucedida.</a:t>
             </a:r>
             <a:endParaRPr b="0" lang="pt-BR" sz="1100" strike="noStrike" u="none">
               <a:solidFill>
@@ -8961,7 +8961,7 @@
                 <a:latin typeface="Aptos"/>
                 <a:ea typeface="Aptos"/>
               </a:rPr>
-              <a:t>• Queiroz: múltiplas expressões exibem aspectos distintos do mesmo conceito.</a:t>
+              <a:t>Múltiplas expressões exibem aspectos distintos do mesmo conceito.</a:t>
             </a:r>
             <a:endParaRPr b="0" lang="pt-BR" sz="1100" strike="noStrike" u="none">
               <a:solidFill>
@@ -8988,7 +8988,7 @@
                 <a:latin typeface="Aptos"/>
                 <a:ea typeface="Aptos"/>
               </a:rPr>
-              <a:t>• Relato: solicitar explicação do raciocínio desenvolvido.</a:t>
+              <a:t>Solicitar explicação do raciocínio desenvolvido.</a:t>
             </a:r>
             <a:endParaRPr b="0" lang="pt-BR" sz="1100" strike="noStrike" u="none">
               <a:solidFill>
@@ -10084,7 +10084,7 @@
                 <a:latin typeface="Aptos"/>
                 <a:ea typeface="Aptos"/>
               </a:rPr>
-              <a:t>• Wessels: níveis SOLO ajudam a observar respostas de menor a maior integração.</a:t>
+              <a:t>Níveis SOLO ajudam a observar respostas de menor a maior integração.</a:t>
             </a:r>
             <a:endParaRPr b="0" lang="pt-BR" sz="1200" strike="noStrike" u="none">
               <a:solidFill>
@@ -10111,7 +10111,7 @@
                 <a:latin typeface="Aptos"/>
                 <a:ea typeface="Aptos"/>
               </a:rPr>
-              <a:t>• Queiroz: o percurso da tarefa revela mudanças no discurso e na ação.</a:t>
+              <a:t>O percurso da tarefa revela mudanças no discurso e na ação.</a:t>
             </a:r>
             <a:endParaRPr b="0" lang="pt-BR" sz="1200" strike="noStrike" u="none">
               <a:solidFill>
@@ -10138,7 +10138,7 @@
                 <a:latin typeface="Aptos"/>
                 <a:ea typeface="Aptos"/>
               </a:rPr>
-              <a:t>• Relato: avaliar o percurso de pensamento, não apenas o código final.</a:t>
+              <a:t>Avaliar o percurso de pensamento, não apenas o código final.</a:t>
             </a:r>
             <a:endParaRPr b="0" lang="pt-BR" sz="1200" strike="noStrike" u="none">
               <a:solidFill>
@@ -13967,7 +13967,7 @@
                 <a:latin typeface="Aptos"/>
                 <a:ea typeface="Aptos"/>
               </a:rPr>
-              <a:t>• Wessels: organizar dados é componente crítico da representação.</a:t>
+              <a:t>Organizar dados é componente crítico da representação.</a:t>
             </a:r>
             <a:endParaRPr b="0" lang="pt-BR" sz="1300" strike="noStrike" u="none">
               <a:solidFill>
@@ -13994,7 +13994,7 @@
                 <a:latin typeface="Aptos"/>
                 <a:ea typeface="Aptos"/>
               </a:rPr>
-              <a:t>• Queiroz: representações ampliam a percepção de propriedades e relações.</a:t>
+              <a:t>Representações ampliam a percepção de propriedades e relações.</a:t>
             </a:r>
             <a:endParaRPr b="0" lang="pt-BR" sz="1300" strike="noStrike" u="none">
               <a:solidFill>
@@ -14021,7 +14021,7 @@
                 <a:latin typeface="Aptos"/>
                 <a:ea typeface="Aptos"/>
               </a:rPr>
-              <a:t>• Relato: favorecer investigação antes da formalização.</a:t>
+              <a:t>Favorecer investigação antes da formalização.</a:t>
             </a:r>
             <a:endParaRPr b="0" lang="pt-BR" sz="1300" strike="noStrike" u="none">
               <a:solidFill>
@@ -15147,7 +15147,7 @@
                 <a:latin typeface="Aptos"/>
                 <a:ea typeface="Aptos"/>
               </a:rPr>
-              <a:t>• Wessels: organizar dados é componente crítico da representação.</a:t>
+              <a:t>Organizar dados é componente crítico da representação.</a:t>
             </a:r>
             <a:endParaRPr b="0" lang="pt-BR" sz="1050" strike="noStrike" u="none">
               <a:solidFill>
@@ -15174,7 +15174,7 @@
                 <a:latin typeface="Aptos"/>
                 <a:ea typeface="Aptos"/>
               </a:rPr>
-              <a:t>• Queiroz: múltiplas expressões exibem aspectos distintos do mesmo conceito.</a:t>
+              <a:t>Múltiplas expressões exibem aspectos distintos do mesmo conceito.</a:t>
             </a:r>
             <a:endParaRPr b="0" lang="pt-BR" sz="1050" strike="noStrike" u="none">
               <a:solidFill>
@@ -15201,7 +15201,7 @@
                 <a:latin typeface="Aptos"/>
                 <a:ea typeface="Aptos"/>
               </a:rPr>
-              <a:t>• Relato: articular código, texto, tabela, gráfico e interpretação.</a:t>
+              <a:t>Articular código, texto, tabela, gráfico e interpretação.</a:t>
             </a:r>
             <a:endParaRPr b="0" lang="pt-BR" sz="1050" strike="noStrike" u="none">
               <a:solidFill>
@@ -16327,7 +16327,7 @@
                 <a:latin typeface="Aptos"/>
                 <a:ea typeface="Aptos"/>
               </a:rPr>
-              <a:t>• Relato: incluir revisão, depuração e reconstrução.</a:t>
+              <a:t>Incluir revisão, depuração e reconstrução.</a:t>
             </a:r>
             <a:endParaRPr b="0" lang="pt-BR" sz="1300" strike="noStrike" u="none">
               <a:solidFill>
@@ -16354,7 +16354,7 @@
                 <a:latin typeface="Aptos"/>
                 <a:ea typeface="Aptos"/>
               </a:rPr>
-              <a:t>• Queiroz: a forma de representação influencia erros, antecipações e reorganizações.</a:t>
+              <a:t>A forma de representação influencia erros, antecipações e reorganizações.</a:t>
             </a:r>
             <a:endParaRPr b="0" lang="pt-BR" sz="1300" strike="noStrike" u="none">
               <a:solidFill>
@@ -16381,7 +16381,7 @@
                 <a:latin typeface="Aptos"/>
                 <a:ea typeface="Aptos"/>
               </a:rPr>
-              <a:t>• Wessels: respostas idiossincráticas também revelam modos de pensar.</a:t>
+              <a:t>Respostas idiossincráticas também revelam modos de pensar.</a:t>
             </a:r>
             <a:endParaRPr b="0" lang="pt-BR" sz="1300" strike="noStrike" u="none">
               <a:solidFill>
@@ -17537,7 +17537,7 @@
                 <a:latin typeface="Aptos"/>
                 <a:ea typeface="Aptos"/>
               </a:rPr>
-              <a:t>• Wessels: múltiplas representações indicam modelagem mais bem-sucedida.</a:t>
+              <a:t>Múltiplas representações indicam modelagem mais bem-sucedida.</a:t>
             </a:r>
             <a:endParaRPr b="0" lang="pt-BR" sz="1300" strike="noStrike" u="none">
               <a:solidFill>
@@ -17564,7 +17564,7 @@
                 <a:latin typeface="Aptos"/>
                 <a:ea typeface="Aptos"/>
               </a:rPr>
-              <a:t>• Queiroz: a análise qualitativa observa invariantes e relações mobilizadas na ação.</a:t>
+              <a:t>A análise qualitativa observa invariantes e relações mobilizadas na ação.</a:t>
             </a:r>
             <a:endParaRPr b="0" lang="pt-BR" sz="1300" strike="noStrike" u="none">
               <a:solidFill>
@@ -17591,7 +17591,7 @@
                 <a:latin typeface="Aptos"/>
                 <a:ea typeface="Aptos"/>
               </a:rPr>
-              <a:t>• Relato: permitir manipulação de parâmetros e comparação de estados.</a:t>
+              <a:t>Permitir manipulação de parâmetros e comparação de estados.</a:t>
             </a:r>
             <a:endParaRPr b="0" lang="pt-BR" sz="1300" strike="noStrike" u="none">
               <a:solidFill>
